--- a/presentation/DATA400_market_value_presentation.pptx
+++ b/presentation/DATA400_market_value_presentation.pptx
@@ -117,7 +117,7 @@
   <p:extLst>
     <p:ext uri="{521415D9-36F7-43E2-AB2F-B90AF26B5E84}">
       <p14:sectionLst xmlns:p14="http://schemas.microsoft.com/office/powerpoint/2010/main">
-        <p14:section name="Presentation" id="{429cdbb7-0ac7-95bb-5c24-a8dceab705c3}">
+        <p14:section name="Presentation" id="{99dfdaa1-6351-c5e8-d7f3-50ad2a702cbe}">
           <p14:sldIdLst>
             <p14:sldId id="256"/>
             <p14:sldId id="257"/>
@@ -1210,7 +1210,7 @@
           <a:p>
             <a:r>
               <a:rPr lang="en-US" dirty="0"/>
-              <a:t>Go across the six cards in order and keep each to one sentence. End by repeating that all of these are associations.
+              <a:t>Go across the six cards in order and keep each to one sentence. On playing time, say the causal direction is unclear: clubs may give more minutes to players they already value, playing regularly may raise visibility, and ability or club level may affect both; none of these was tested. End by repeating that all of these are associations.
 Remember: Use one number per card: €2.0M peak at 24-26, 0.51, 0.37, €13M, €10M, 0.21.
 Caution: None of these is causal.
 Next: "And here is what the project cannot show."</a:t>
@@ -1481,7 +1481,7 @@
           <a:p>
             <a:r>
               <a:rPr lang="en-US" dirty="0"/>
-              <a:t>Source is David Caribou's public transfermarkt-datasets, which is scraped from Transfermarkt and released under CC0. Walk through the four numbers: 32,046 player-seasons, 13,511 different players, 14 domestic European leagues, five seasons from 2020/21 to 2024/25. Explain the unit: one row is one player in one season, so a player who played all five seasons appears five times. List the main variables quickly; do not read every one.
+              <a:t>Source is David Caribou's public transfermarkt-datasets, which is scraped from Transfermarkt and released under CC0. Walk through the four numbers: 32,046 player-seasons, 13,511 different players, 14 domestic European leagues, five seasons from 2020/21 to 2024/25. I used a fixed five-season window to keep the scope manageable and consistent. Explain the unit: one row is one player in one season, so a player who played all five seasons appears five times. List the main variables quickly; do not read every one.
 Remember: 32,046 player-seasons
 Caution: Rows are not independent people: the same player can appear up to five times.
 Next: "The raw data did not come in this shape, so here is how I built it."</a:t>
@@ -1572,7 +1572,7 @@
           <a:p>
             <a:r>
               <a:rPr lang="en-US" dirty="0"/>
-              <a:t>The raw data is match-level: about 1.9 million appearance rows. Follow the arrows: join each appearance to its game to get season and league, add up minutes, goals and assists per player per season, attach age and position, then attach the valuation at the end of that season. Then the three rules. 450 minutes: per-90 rates explode for players who barely played, one goal in one minute is 90 goals per 90, so rates are only used above five full matches; low-minute players stay in the data for everything else. July 31: Transfermarkt updates values a few times a year, mostly in June, so I take the latest value on or before July 31 after the season. 365 days: if that value is more than a year old, the row is excluded. In total 920 rows (2.8%) were excluded.
+              <a:t>The raw data is match-level: about 1.9 million appearance rows. Follow the arrows: join each appearance to its game to get season and league, add up minutes, goals and assists per player per season, attach age and position, then attach the valuation at the end of that season. Then the three rules. 450 minutes: per-90 rates explode for players who barely played, one goal in one minute is 90 goals per 90, so rates are only used above five full matches; low-minute players stay in the data for everything else. July 31: Transfermarkt updates values a few times a year, with a big round in June, so I take the latest value on or before July 31 after the season. It is a consistent post-season cutoff that captures that June update while avoiding values from the following season; a practical choice, not the one correct date. 365 days: if that value is more than a year old, the row is excluded. In total 920 rows (2.8%) were excluded: 14 had no position or birth date, 490 had no valuation by the cutoff, and 416 had a valuation, but one more than a year old. The exact counts are on backup slide A.
 Remember: 920 excluded of 32,966 (2.8%)
 Caution: These thresholds are practical choices, not the only correct ones.
 Next: "With the dataset built, the first question everyone asks is about age."</a:t>
@@ -1754,7 +1754,7 @@
           <a:p>
             <a:r>
               <a:rPr lang="en-US" dirty="0"/>
-              <a:t>Goals and assists mean different things for different jobs. For attackers with at least 450 minutes, goals per 90 has a Spearman correlation of 0.37 with value; for midfielders 0.23; for defenders 0.18. The scatter shows attackers: lots of spread, but the median line rises steadily. The caution: this does not say goals are how you judge a defender. The dataset has no tackles, interceptions or saves, so defenders and goalkeepers are under-described.
+              <a:t>Goals and assists mean different things for different jobs. For attackers with at least 450 minutes, goals per 90 has a Spearman correlation of 0.37 with value; for midfielders 0.23; for defenders 0.18. The scatter shows attackers: the dots are a random sample of 2,500 attacker-seasons so the chart stays readable, but the black median line and the correlation use all 6,095 eligible attackers. Lots of spread, but the median line rises steadily. The caution: this does not say goals are how you judge a defender. The dataset has no tackles, interceptions or saves, so defenders and goalkeepers are under-described.
 Remember: Goals/90 vs value: 0.37 attackers, 0.23 midfielders, 0.18 defenders
 Caution: Moderate correlation: plenty of high scorers with modest values and the reverse.
 Next: "Position and performance differ within leagues, but the biggest gaps are between leagues."</a:t>
@@ -1936,7 +1936,7 @@
           <a:p>
             <a:r>
               <a:rPr lang="en-US" dirty="0"/>
-              <a:t>Here I split attackers with at least 450 minutes into three age bands and into high or lower output, where high output means the top quarter of goals plus assists per 90. Young high-output attackers have the highest median, €10M, then prime-age high-output €8M, then experienced high-output €3.5M. Lower-output groups sit around €1-2.3M. At the same output, younger is valued higher. I checked it is not just a league effect: the same ordering holds inside the top-five leagues (€31M vs €25M) and outside them (€5M vs €4.5M).
+              <a:t>Here I split attackers with at least 450 minutes into three age bands and into high or lower output, where high output means the top quarter of goals plus assists per 90. Young high-output attackers have the highest median, €10M, then prime-age high-output €8M, then experienced high-output €3.5M. Lower-output groups sit around €1-2.3M. At the same output, younger is valued higher. I checked it is not just a league effect: the same ordering holds inside the top-five leagues (€31M vs €25M) and outside them (€5M vs €4.5M). Why younger players are valued higher (future potential, resale value) is a possible explanation only; the data does not measure it.
 Remember: Young high output €10M vs prime €8M vs experienced €3.5M
 Caution: Descriptive only. A plausible explanation is resale value and future potential, but the data cannot test that.
 Next: "My professor suggested checking whether players fall into natural groups, so I tried clustering."</a:t>
@@ -2027,7 +2027,7 @@
           <a:p>
             <a:r>
               <a:rPr lang="en-US" dirty="0"/>
-              <a:t>K-means puts players with similar numbers into the same group. I used 6,095 attacker-seasons with at least 450 minutes and four inputs: age, minutes, goals per 90, assists per 90, scaled so each counts equally. Market value and league were not inputs, so value can be compared afterwards and the method cannot produce 'league clusters'. I tried k from 2 to 6. The silhouette score, which measures how well separated the groups are, was only about 0.21 to 0.22 at every k, which is weak. I kept k = 4 because the groups are readable: regular starters (€8M), creative attackers (€5M), younger lower-output (€1.5M), older with fewer minutes (€1M). The honest conclusion: attacker profiles form a continuum, and K-means sliced it into four readable but overlapping groups.
+              <a:t>My professor suggested checking whether players form natural groups, so I tried K-means, which puts players with similar numbers into the same group. I used 6,095 attacker-seasons with at least 450 minutes and four inputs: age, total minutes, goals per 90 and assists per 90. The per-90 rates were capped at the 99th percentile and everything was standardised (StandardScaler) so each input counts equally. Market value and league were not inputs, so value can be compared afterwards and the method cannot produce 'league clusters'. I tried k from 2 to 6. The silhouette score, which measures how well separated the groups are, was only about 0.21 to 0.22 at every k, and there was no sharp elbow. I kept k = 4 because the groups are interpretable, not because a metric selected it: regular high-minute starters (€8M), creative attackers (€5M), younger lower-output (€1.5M), older with fewer minutes (€1M). So K-means produced four interpretable but overlapping profiles; attacker profiles look more like a continuum. Because natural separation was weak, I also compared transparent rule-based segments, defined by me, not machine learning. The age x output grouping on the previous slide is one example of that kind of transparent comparison.
 Remember: Silhouette ~0.21 at every k
 Caution: Do not say K-means found the true types of attacker, or league groups.
 Next: "Putting it together, here is what I can and cannot conclude."</a:t>
@@ -3188,7 +3188,7 @@
                   <a:schemeClr val="bg1"/>
                 </a:solidFill>
               </a:rPr>
-              <a:t>One of the strongest simple associations (Spearman 0.51), in both directions.</a:t>
+              <a:t>One of the strongest simple associations (Spearman 0.51); causal direction is unclear.</a:t>
             </a:r>
             <a:endParaRPr lang="en-US" sz="1300" dirty="0"/>
           </a:p>
@@ -7237,7 +7237,7 @@
                   <a:schemeClr val="tx1"/>
                 </a:solidFill>
               </a:rPr>
-              <a:t>32,966 → 32,046 player-seasons: 920 excluded (2.8%) for missing position, birth date or valuation. Players changing clubs keep one row, labelled by the club where they played most.</a:t>
+              <a:t>32,966 → 32,046 player-seasons: 920 rows (2.8%) excluded for missing position or birth date, missing valuations, or valuations more than a year old. Players changing clubs keep one row, labelled by the club where they played most.</a:t>
             </a:r>
             <a:endParaRPr lang="en-US" sz="1200" dirty="0"/>
           </a:p>
@@ -7773,7 +7773,7 @@
                   <a:schemeClr val="accent2"/>
                 </a:solidFill>
               </a:rPr>
-              <a:t>Each dot is an attacker-season; black line = medians of 8 equal-size groups.</a:t>
+              <a:t>Dots: random sample of 2,500 attacker-seasons. Median line and correlation use all 6,095 eligible attackers.</a:t>
             </a:r>
             <a:endParaRPr lang="en-US" sz="1000" dirty="0"/>
           </a:p>
@@ -8766,7 +8766,7 @@
                   <a:schemeClr val="tx1"/>
                 </a:solidFill>
               </a:rPr>
-              <a:t>Inputs: age, minutes, goals/90, assists/90</a:t>
+              <a:t>Inputs (standardised): age, minutes, goals/90, assists/90</a:t>
             </a:r>
             <a:endParaRPr lang="en-US" sz="1300" dirty="0"/>
           </a:p>
@@ -8904,7 +8904,7 @@
                   <a:srgbClr val="CADCFC"/>
                 </a:solidFill>
               </a:rPr>
-              <a:t>silhouette score at every k: weak separation. Profiles overlap; a continuum, not four true types.</a:t>
+              <a:t>silhouette at every k, no sharp elbow: weak separation. Four interpretable but overlapping profiles.</a:t>
             </a:r>
             <a:endParaRPr lang="en-US" sz="1200" dirty="0"/>
           </a:p>

--- a/presentation/DATA400_market_value_presentation.pptx
+++ b/presentation/DATA400_market_value_presentation.pptx
@@ -1572,7 +1572,7 @@
           <a:p>
             <a:r>
               <a:rPr lang="en-US" dirty="0"/>
-              <a:t>The raw data is match-level: about 1.9 million appearance rows. Follow the arrows: join each appearance to its game to get season and league, add up minutes, goals and assists per player per season, attach age and position, then attach the valuation at the end of that season. Then the three rules. 450 minutes: per-90 rates explode for players who barely played, one goal in one minute is 90 goals per 90, so rates are only used above five full matches; low-minute players stay in the data for everything else. July 31: Transfermarkt updates values a few times a year, with a big round in June, so I take the latest value on or before July 31 after the season. It is a consistent post-season cutoff that captures that June update while avoiding values from the following season; a practical choice, not the one correct date. 365 days: if that value is more than a year old, the row is excluded. In total 920 rows (2.8%) were excluded: 14 had no position or birth date, 490 had no valuation by the cutoff, and 416 had a valuation, but one more than a year old. The exact counts are on backup slide A.
+              <a:t>The raw data is match-level: about 1.9 million appearance rows. Follow the arrows: join each appearance to its game to get season and league, add up minutes, goals and assists per player per season, attach age and position, then attach the valuation at the end of that season. Then the three rules. 450 minutes: per-90 rates explode for players who barely played, one goal in one minute is 90 goals per 90, so rates are only used above five full matches; low-minute players stay in the data for everything else. July 31: Transfermarkt updates values a few times a year, with a big round in June, so I take the latest value on or before July 31 after the season. It is a consistent post-season cutoff that captures that June update while avoiding values from the following season; a practical choice, not the one correct date. 365 days: if that value is more than a year old, the row is excluded. In total 920 rows (2.8%) were excluded: 14 had no position or birth date, 490 had no valuation by the cutoff, and 416 had a valuation, but one more than a year old.
 Remember: 920 excluded of 32,966 (2.8%)
 Caution: These thresholds are practical choices, not the only correct ones.
 Next: "With the dataset built, the first question everyone asks is about age."</a:t>
